--- a/HealthBRO.pptx
+++ b/HealthBRO.pptx
@@ -5,24 +5,25 @@
     <p:sldMasterId id="2147483712" r:id="rId1"/>
   </p:sldMasterIdLst>
   <p:notesMasterIdLst>
-    <p:notesMasterId r:id="rId17"/>
+    <p:notesMasterId r:id="rId18"/>
   </p:notesMasterIdLst>
   <p:sldIdLst>
     <p:sldId id="256" r:id="rId2"/>
     <p:sldId id="270" r:id="rId3"/>
     <p:sldId id="257" r:id="rId4"/>
     <p:sldId id="266" r:id="rId5"/>
-    <p:sldId id="258" r:id="rId6"/>
-    <p:sldId id="272" r:id="rId7"/>
-    <p:sldId id="259" r:id="rId8"/>
-    <p:sldId id="260" r:id="rId9"/>
-    <p:sldId id="268" r:id="rId10"/>
-    <p:sldId id="261" r:id="rId11"/>
-    <p:sldId id="262" r:id="rId12"/>
-    <p:sldId id="269" r:id="rId13"/>
+    <p:sldId id="272" r:id="rId6"/>
+    <p:sldId id="259" r:id="rId7"/>
+    <p:sldId id="260" r:id="rId8"/>
+    <p:sldId id="268" r:id="rId9"/>
+    <p:sldId id="261" r:id="rId10"/>
+    <p:sldId id="262" r:id="rId11"/>
+    <p:sldId id="269" r:id="rId12"/>
+    <p:sldId id="258" r:id="rId13"/>
     <p:sldId id="265" r:id="rId14"/>
     <p:sldId id="271" r:id="rId15"/>
-    <p:sldId id="267" r:id="rId16"/>
+    <p:sldId id="273" r:id="rId16"/>
+    <p:sldId id="267" r:id="rId17"/>
   </p:sldIdLst>
   <p:sldSz cx="12192000" cy="6858000"/>
   <p:notesSz cx="6858000" cy="9144000"/>
@@ -3393,7 +3394,7 @@
           <a:p>
             <a:fld id="{19D946E0-DD12-4A45-9E0E-B9D744E5C3E5}" type="datetimeFigureOut">
               <a:rPr lang="hu-HU" smtClean="0"/>
-              <a:t>2025. 05. 18.</a:t>
+              <a:t>2025. 05. 19.</a:t>
             </a:fld>
             <a:endParaRPr lang="hu-HU"/>
           </a:p>
@@ -3790,6 +3791,9 @@
           <a:p>
             <a:endParaRPr lang="hu-HU" dirty="0"/>
           </a:p>
+          <a:p>
+            <a:endParaRPr lang="hu-HU" dirty="0"/>
+          </a:p>
         </p:txBody>
       </p:sp>
       <p:sp>
@@ -3809,7 +3813,7 @@
           <a:p>
             <a:fld id="{7C2AB6A8-B56E-49A7-8176-476DB104EDCC}" type="slidenum">
               <a:rPr lang="hu-HU" smtClean="0"/>
-              <a:t>5</a:t>
+              <a:t>6</a:t>
             </a:fld>
             <a:endParaRPr lang="hu-HU"/>
           </a:p>
@@ -3818,7 +3822,7 @@
     </p:spTree>
     <p:extLst>
       <p:ext uri="{BB962C8B-B14F-4D97-AF65-F5344CB8AC3E}">
-        <p14:creationId xmlns:p14="http://schemas.microsoft.com/office/powerpoint/2010/main" val="3647121161"/>
+        <p14:creationId xmlns:p14="http://schemas.microsoft.com/office/powerpoint/2010/main" val="3861029352"/>
       </p:ext>
     </p:extLst>
   </p:cSld>
@@ -3874,9 +3878,6 @@
           <a:p>
             <a:endParaRPr lang="hu-HU" dirty="0"/>
           </a:p>
-          <a:p>
-            <a:endParaRPr lang="hu-HU" dirty="0"/>
-          </a:p>
         </p:txBody>
       </p:sp>
       <p:sp>
@@ -3896,7 +3897,7 @@
           <a:p>
             <a:fld id="{7C2AB6A8-B56E-49A7-8176-476DB104EDCC}" type="slidenum">
               <a:rPr lang="hu-HU" smtClean="0"/>
-              <a:t>7</a:t>
+              <a:t>9</a:t>
             </a:fld>
             <a:endParaRPr lang="hu-HU"/>
           </a:p>
@@ -3905,7 +3906,7 @@
     </p:spTree>
     <p:extLst>
       <p:ext uri="{BB962C8B-B14F-4D97-AF65-F5344CB8AC3E}">
-        <p14:creationId xmlns:p14="http://schemas.microsoft.com/office/powerpoint/2010/main" val="3861029352"/>
+        <p14:creationId xmlns:p14="http://schemas.microsoft.com/office/powerpoint/2010/main" val="1255830571"/>
       </p:ext>
     </p:extLst>
   </p:cSld>
@@ -3989,7 +3990,7 @@
     </p:spTree>
     <p:extLst>
       <p:ext uri="{BB962C8B-B14F-4D97-AF65-F5344CB8AC3E}">
-        <p14:creationId xmlns:p14="http://schemas.microsoft.com/office/powerpoint/2010/main" val="1255830571"/>
+        <p14:creationId xmlns:p14="http://schemas.microsoft.com/office/powerpoint/2010/main" val="2307568358"/>
       </p:ext>
     </p:extLst>
   </p:cSld>
@@ -4064,7 +4065,7 @@
           <a:p>
             <a:fld id="{7C2AB6A8-B56E-49A7-8176-476DB104EDCC}" type="slidenum">
               <a:rPr lang="hu-HU" smtClean="0"/>
-              <a:t>11</a:t>
+              <a:t>12</a:t>
             </a:fld>
             <a:endParaRPr lang="hu-HU"/>
           </a:p>
@@ -4073,7 +4074,7 @@
     </p:spTree>
     <p:extLst>
       <p:ext uri="{BB962C8B-B14F-4D97-AF65-F5344CB8AC3E}">
-        <p14:creationId xmlns:p14="http://schemas.microsoft.com/office/powerpoint/2010/main" val="2307568358"/>
+        <p14:creationId xmlns:p14="http://schemas.microsoft.com/office/powerpoint/2010/main" val="3647121161"/>
       </p:ext>
     </p:extLst>
   </p:cSld>
@@ -4322,7 +4323,7 @@
           <a:p>
             <a:fld id="{81B8F32D-D8B6-4B9E-9CBF-DCAC30B7B93D}" type="datetimeFigureOut">
               <a:rPr lang="en-US" smtClean="0"/>
-              <a:t>5/18/2025</a:t>
+              <a:t>5/19/2025</a:t>
             </a:fld>
             <a:endParaRPr lang="en-US"/>
           </a:p>
@@ -4638,7 +4639,7 @@
           <a:p>
             <a:fld id="{81B8F32D-D8B6-4B9E-9CBF-DCAC30B7B93D}" type="datetimeFigureOut">
               <a:rPr lang="en-US" smtClean="0"/>
-              <a:t>5/18/2025</a:t>
+              <a:t>5/19/2025</a:t>
             </a:fld>
             <a:endParaRPr lang="en-US"/>
           </a:p>
@@ -4943,7 +4944,7 @@
           <a:p>
             <a:fld id="{81B8F32D-D8B6-4B9E-9CBF-DCAC30B7B93D}" type="datetimeFigureOut">
               <a:rPr lang="en-US" smtClean="0"/>
-              <a:t>5/18/2025</a:t>
+              <a:t>5/19/2025</a:t>
             </a:fld>
             <a:endParaRPr lang="en-US"/>
           </a:p>
@@ -5150,7 +5151,7 @@
           <a:p>
             <a:fld id="{81B8F32D-D8B6-4B9E-9CBF-DCAC30B7B93D}" type="datetimeFigureOut">
               <a:rPr lang="en-US" smtClean="0"/>
-              <a:t>5/18/2025</a:t>
+              <a:t>5/19/2025</a:t>
             </a:fld>
             <a:endParaRPr lang="en-US"/>
           </a:p>
@@ -5498,7 +5499,7 @@
           <a:p>
             <a:fld id="{81B8F32D-D8B6-4B9E-9CBF-DCAC30B7B93D}" type="datetimeFigureOut">
               <a:rPr lang="en-US" smtClean="0"/>
-              <a:t>5/18/2025</a:t>
+              <a:t>5/19/2025</a:t>
             </a:fld>
             <a:endParaRPr lang="en-US"/>
           </a:p>
@@ -5969,7 +5970,7 @@
           <a:p>
             <a:fld id="{81B8F32D-D8B6-4B9E-9CBF-DCAC30B7B93D}" type="datetimeFigureOut">
               <a:rPr lang="en-US" smtClean="0"/>
-              <a:t>5/18/2025</a:t>
+              <a:t>5/19/2025</a:t>
             </a:fld>
             <a:endParaRPr lang="en-US"/>
           </a:p>
@@ -6504,7 +6505,7 @@
           <a:p>
             <a:fld id="{81B8F32D-D8B6-4B9E-9CBF-DCAC30B7B93D}" type="datetimeFigureOut">
               <a:rPr lang="en-US" smtClean="0"/>
-              <a:t>5/18/2025</a:t>
+              <a:t>5/19/2025</a:t>
             </a:fld>
             <a:endParaRPr lang="en-US"/>
           </a:p>
@@ -6721,7 +6722,7 @@
           <a:p>
             <a:fld id="{81B8F32D-D8B6-4B9E-9CBF-DCAC30B7B93D}" type="datetimeFigureOut">
               <a:rPr lang="en-US" smtClean="0"/>
-              <a:t>5/18/2025</a:t>
+              <a:t>5/19/2025</a:t>
             </a:fld>
             <a:endParaRPr lang="en-US"/>
           </a:p>
@@ -6926,7 +6927,7 @@
           <a:p>
             <a:fld id="{81B8F32D-D8B6-4B9E-9CBF-DCAC30B7B93D}" type="datetimeFigureOut">
               <a:rPr lang="en-US" smtClean="0"/>
-              <a:t>5/18/2025</a:t>
+              <a:t>5/19/2025</a:t>
             </a:fld>
             <a:endParaRPr lang="en-US"/>
           </a:p>
@@ -7256,7 +7257,7 @@
           <a:p>
             <a:fld id="{81B8F32D-D8B6-4B9E-9CBF-DCAC30B7B93D}" type="datetimeFigureOut">
               <a:rPr lang="en-US" smtClean="0"/>
-              <a:t>5/18/2025</a:t>
+              <a:t>5/19/2025</a:t>
             </a:fld>
             <a:endParaRPr lang="en-US"/>
           </a:p>
@@ -7566,7 +7567,7 @@
           <a:p>
             <a:fld id="{81B8F32D-D8B6-4B9E-9CBF-DCAC30B7B93D}" type="datetimeFigureOut">
               <a:rPr lang="en-US" smtClean="0"/>
-              <a:t>5/18/2025</a:t>
+              <a:t>5/19/2025</a:t>
             </a:fld>
             <a:endParaRPr lang="en-US"/>
           </a:p>
@@ -7807,7 +7808,7 @@
             <a:fld id="{81B8F32D-D8B6-4B9E-9CBF-DCAC30B7B93D}" type="datetimeFigureOut">
               <a:rPr lang="en-US" smtClean="0"/>
               <a:pPr/>
-              <a:t>5/18/2025</a:t>
+              <a:t>5/19/2025</a:t>
             </a:fld>
             <a:endParaRPr lang="en-US" dirty="0"/>
           </a:p>
@@ -8635,455 +8636,6 @@
 <file path=ppt/slides/slide10.xml><?xml version="1.0" encoding="utf-8"?>
 <p:sld xmlns:a="http://schemas.openxmlformats.org/drawingml/2006/main" xmlns:r="http://schemas.openxmlformats.org/officeDocument/2006/relationships" xmlns:p="http://schemas.openxmlformats.org/presentationml/2006/main">
   <p:cSld>
-    <p:bg>
-      <p:bgPr>
-        <a:solidFill>
-          <a:schemeClr val="bg1"/>
-        </a:solidFill>
-        <a:effectLst/>
-      </p:bgPr>
-    </p:bg>
-    <p:spTree>
-      <p:nvGrpSpPr>
-        <p:cNvPr id="1" name=""/>
-        <p:cNvGrpSpPr/>
-        <p:nvPr/>
-      </p:nvGrpSpPr>
-      <p:grpSpPr>
-        <a:xfrm>
-          <a:off x="0" y="0"/>
-          <a:ext cx="0" cy="0"/>
-          <a:chOff x="0" y="0"/>
-          <a:chExt cx="0" cy="0"/>
-        </a:xfrm>
-      </p:grpSpPr>
-      <p:cxnSp>
-        <p:nvCxnSpPr>
-          <p:cNvPr id="9" name="Straight Connector 8">
-            <a:extLst>
-              <a:ext uri="{FF2B5EF4-FFF2-40B4-BE49-F238E27FC236}">
-                <a16:creationId xmlns:a16="http://schemas.microsoft.com/office/drawing/2014/main" id="{108D74AC-B125-4E11-BA53-E9E383966DF8}"/>
-              </a:ext>
-              <a:ext uri="{C183D7F6-B498-43B3-948B-1728B52AA6E4}">
-                <adec:decorative xmlns:adec="http://schemas.microsoft.com/office/drawing/2017/decorative" val="1"/>
-              </a:ext>
-            </a:extLst>
-          </p:cNvPr>
-          <p:cNvCxnSpPr>
-            <a:cxnSpLocks noGrp="1" noRot="1" noChangeAspect="1" noMove="1" noResize="1" noEditPoints="1" noAdjustHandles="1" noChangeArrowheads="1" noChangeShapeType="1"/>
-          </p:cNvCxnSpPr>
-          <p:nvPr>
-            <p:extLst>
-              <p:ext uri="{386F3935-93C4-4BCD-93E2-E3B085C9AB24}">
-                <p16:designElem xmlns:p16="http://schemas.microsoft.com/office/powerpoint/2015/main" val="1"/>
-              </p:ext>
-            </p:extLst>
-          </p:nvPr>
-        </p:nvCxnSpPr>
-        <p:spPr>
-          <a:xfrm>
-            <a:off x="482600" y="489855"/>
-            <a:ext cx="11147071" cy="0"/>
-          </a:xfrm>
-          <a:prstGeom prst="line">
-            <a:avLst/>
-          </a:prstGeom>
-          <a:ln w="28575">
-            <a:solidFill>
-              <a:schemeClr val="tx2"/>
-            </a:solidFill>
-          </a:ln>
-        </p:spPr>
-        <p:style>
-          <a:lnRef idx="1">
-            <a:schemeClr val="dk1"/>
-          </a:lnRef>
-          <a:fillRef idx="0">
-            <a:schemeClr val="dk1"/>
-          </a:fillRef>
-          <a:effectRef idx="0">
-            <a:schemeClr val="dk1"/>
-          </a:effectRef>
-          <a:fontRef idx="minor">
-            <a:schemeClr val="tx1"/>
-          </a:fontRef>
-        </p:style>
-      </p:cxnSp>
-      <p:cxnSp>
-        <p:nvCxnSpPr>
-          <p:cNvPr id="11" name="Straight Connector 10">
-            <a:extLst>
-              <a:ext uri="{FF2B5EF4-FFF2-40B4-BE49-F238E27FC236}">
-                <a16:creationId xmlns:a16="http://schemas.microsoft.com/office/drawing/2014/main" id="{9DC76EBE-FB9D-4054-B5D8-19E3EAFE40B2}"/>
-              </a:ext>
-              <a:ext uri="{C183D7F6-B498-43B3-948B-1728B52AA6E4}">
-                <adec:decorative xmlns:adec="http://schemas.microsoft.com/office/drawing/2017/decorative" val="1"/>
-              </a:ext>
-            </a:extLst>
-          </p:cNvPr>
-          <p:cNvCxnSpPr>
-            <a:cxnSpLocks noGrp="1" noRot="1" noChangeAspect="1" noMove="1" noResize="1" noEditPoints="1" noAdjustHandles="1" noChangeArrowheads="1" noChangeShapeType="1"/>
-          </p:cNvCxnSpPr>
-          <p:nvPr>
-            <p:extLst>
-              <p:ext uri="{386F3935-93C4-4BCD-93E2-E3B085C9AB24}">
-                <p16:designElem xmlns:p16="http://schemas.microsoft.com/office/powerpoint/2015/main" val="1"/>
-              </p:ext>
-            </p:extLst>
-          </p:nvPr>
-        </p:nvCxnSpPr>
-        <p:spPr>
-          <a:xfrm>
-            <a:off x="482600" y="6368138"/>
-            <a:ext cx="11147071" cy="0"/>
-          </a:xfrm>
-          <a:prstGeom prst="line">
-            <a:avLst/>
-          </a:prstGeom>
-          <a:ln w="28575">
-            <a:solidFill>
-              <a:schemeClr val="tx2"/>
-            </a:solidFill>
-          </a:ln>
-        </p:spPr>
-        <p:style>
-          <a:lnRef idx="1">
-            <a:schemeClr val="dk1"/>
-          </a:lnRef>
-          <a:fillRef idx="0">
-            <a:schemeClr val="dk1"/>
-          </a:fillRef>
-          <a:effectRef idx="0">
-            <a:schemeClr val="dk1"/>
-          </a:effectRef>
-          <a:fontRef idx="minor">
-            <a:schemeClr val="tx1"/>
-          </a:fontRef>
-        </p:style>
-      </p:cxnSp>
-      <p:cxnSp>
-        <p:nvCxnSpPr>
-          <p:cNvPr id="13" name="Straight Connector 12">
-            <a:extLst>
-              <a:ext uri="{FF2B5EF4-FFF2-40B4-BE49-F238E27FC236}">
-                <a16:creationId xmlns:a16="http://schemas.microsoft.com/office/drawing/2014/main" id="{A2EFA84C-D756-4DC7-AA46-68D776F37FA4}"/>
-              </a:ext>
-              <a:ext uri="{C183D7F6-B498-43B3-948B-1728B52AA6E4}">
-                <adec:decorative xmlns:adec="http://schemas.microsoft.com/office/drawing/2017/decorative" val="1"/>
-              </a:ext>
-            </a:extLst>
-          </p:cNvPr>
-          <p:cNvCxnSpPr>
-            <a:cxnSpLocks noGrp="1" noRot="1" noChangeAspect="1" noMove="1" noResize="1" noEditPoints="1" noAdjustHandles="1" noChangeArrowheads="1" noChangeShapeType="1"/>
-          </p:cNvCxnSpPr>
-          <p:nvPr>
-            <p:extLst>
-              <p:ext uri="{386F3935-93C4-4BCD-93E2-E3B085C9AB24}">
-                <p16:designElem xmlns:p16="http://schemas.microsoft.com/office/powerpoint/2015/main" val="1"/>
-              </p:ext>
-            </p:extLst>
-          </p:nvPr>
-        </p:nvCxnSpPr>
-        <p:spPr>
-          <a:xfrm>
-            <a:off x="482600" y="489855"/>
-            <a:ext cx="11147071" cy="0"/>
-          </a:xfrm>
-          <a:prstGeom prst="line">
-            <a:avLst/>
-          </a:prstGeom>
-          <a:ln w="28575">
-            <a:solidFill>
-              <a:schemeClr val="tx2"/>
-            </a:solidFill>
-          </a:ln>
-        </p:spPr>
-        <p:style>
-          <a:lnRef idx="1">
-            <a:schemeClr val="dk1"/>
-          </a:lnRef>
-          <a:fillRef idx="0">
-            <a:schemeClr val="dk1"/>
-          </a:fillRef>
-          <a:effectRef idx="0">
-            <a:schemeClr val="dk1"/>
-          </a:effectRef>
-          <a:fontRef idx="minor">
-            <a:schemeClr val="tx1"/>
-          </a:fontRef>
-        </p:style>
-      </p:cxnSp>
-      <p:sp useBgFill="1">
-        <p:nvSpPr>
-          <p:cNvPr id="15" name="Rectangle 14">
-            <a:extLst>
-              <a:ext uri="{FF2B5EF4-FFF2-40B4-BE49-F238E27FC236}">
-                <a16:creationId xmlns:a16="http://schemas.microsoft.com/office/drawing/2014/main" id="{35F60170-91B4-45F0-B88B-9C07AEC4642C}"/>
-              </a:ext>
-              <a:ext uri="{C183D7F6-B498-43B3-948B-1728B52AA6E4}">
-                <adec:decorative xmlns:adec="http://schemas.microsoft.com/office/drawing/2017/decorative" val="1"/>
-              </a:ext>
-            </a:extLst>
-          </p:cNvPr>
-          <p:cNvSpPr>
-            <a:spLocks noGrp="1" noRot="1" noChangeAspect="1" noMove="1" noResize="1" noEditPoints="1" noAdjustHandles="1" noChangeArrowheads="1" noChangeShapeType="1" noTextEdit="1"/>
-          </p:cNvSpPr>
-          <p:nvPr>
-            <p:extLst>
-              <p:ext uri="{386F3935-93C4-4BCD-93E2-E3B085C9AB24}">
-                <p16:designElem xmlns:p16="http://schemas.microsoft.com/office/powerpoint/2015/main" val="1"/>
-              </p:ext>
-            </p:extLst>
-          </p:nvPr>
-        </p:nvSpPr>
-        <p:spPr>
-          <a:xfrm>
-            <a:off x="0" y="0"/>
-            <a:ext cx="12192000" cy="6858001"/>
-          </a:xfrm>
-          <a:prstGeom prst="rect">
-            <a:avLst/>
-          </a:prstGeom>
-          <a:ln>
-            <a:noFill/>
-          </a:ln>
-        </p:spPr>
-        <p:style>
-          <a:lnRef idx="2">
-            <a:schemeClr val="accent1">
-              <a:shade val="50000"/>
-            </a:schemeClr>
-          </a:lnRef>
-          <a:fillRef idx="1">
-            <a:schemeClr val="accent1"/>
-          </a:fillRef>
-          <a:effectRef idx="0">
-            <a:schemeClr val="accent1"/>
-          </a:effectRef>
-          <a:fontRef idx="minor">
-            <a:schemeClr val="lt1"/>
-          </a:fontRef>
-        </p:style>
-        <p:txBody>
-          <a:bodyPr rtlCol="0" anchor="ctr"/>
-          <a:lstStyle/>
-          <a:p>
-            <a:pPr algn="ctr"/>
-            <a:endParaRPr lang="en-US"/>
-          </a:p>
-        </p:txBody>
-      </p:sp>
-      <p:sp>
-        <p:nvSpPr>
-          <p:cNvPr id="4" name="Szövegdoboz 3">
-            <a:extLst>
-              <a:ext uri="{FF2B5EF4-FFF2-40B4-BE49-F238E27FC236}">
-                <a16:creationId xmlns:a16="http://schemas.microsoft.com/office/drawing/2014/main" id="{91499090-0956-2221-30A2-265410ADF278}"/>
-              </a:ext>
-            </a:extLst>
-          </p:cNvPr>
-          <p:cNvSpPr txBox="1"/>
-          <p:nvPr/>
-        </p:nvSpPr>
-        <p:spPr>
-          <a:xfrm>
-            <a:off x="5965296" y="1541070"/>
-            <a:ext cx="5614993" cy="3093468"/>
-          </a:xfrm>
-          <a:prstGeom prst="rect">
-            <a:avLst/>
-          </a:prstGeom>
-        </p:spPr>
-        <p:txBody>
-          <a:bodyPr vert="horz" lIns="91440" tIns="45720" rIns="91440" bIns="45720" rtlCol="0" anchor="b">
-            <a:normAutofit/>
-          </a:bodyPr>
-          <a:lstStyle/>
-          <a:p>
-            <a:pPr>
-              <a:lnSpc>
-                <a:spcPct val="90000"/>
-              </a:lnSpc>
-              <a:spcBef>
-                <a:spcPct val="0"/>
-              </a:spcBef>
-              <a:spcAft>
-                <a:spcPts val="600"/>
-              </a:spcAft>
-            </a:pPr>
-            <a:r>
-              <a:rPr lang="hu-HU" sz="4100" dirty="0">
-                <a:latin typeface="+mj-lt"/>
-                <a:ea typeface="+mj-ea"/>
-                <a:cs typeface="+mj-cs"/>
-              </a:rPr>
-              <a:t>Létre tudunk hozni edzésterveket és azokat módosítani, tetszés szerint.</a:t>
-            </a:r>
-            <a:endParaRPr lang="en-US" sz="4100" dirty="0">
-              <a:latin typeface="+mj-lt"/>
-              <a:ea typeface="+mj-ea"/>
-              <a:cs typeface="+mj-cs"/>
-            </a:endParaRPr>
-          </a:p>
-        </p:txBody>
-      </p:sp>
-      <p:cxnSp>
-        <p:nvCxnSpPr>
-          <p:cNvPr id="17" name="Straight Connector 16">
-            <a:extLst>
-              <a:ext uri="{FF2B5EF4-FFF2-40B4-BE49-F238E27FC236}">
-                <a16:creationId xmlns:a16="http://schemas.microsoft.com/office/drawing/2014/main" id="{FBE3B19C-5EF6-492A-AA6F-EC0C2F236D69}"/>
-              </a:ext>
-              <a:ext uri="{C183D7F6-B498-43B3-948B-1728B52AA6E4}">
-                <adec:decorative xmlns:adec="http://schemas.microsoft.com/office/drawing/2017/decorative" val="1"/>
-              </a:ext>
-            </a:extLst>
-          </p:cNvPr>
-          <p:cNvCxnSpPr>
-            <a:cxnSpLocks noGrp="1" noRot="1" noChangeAspect="1" noMove="1" noResize="1" noEditPoints="1" noAdjustHandles="1" noChangeArrowheads="1" noChangeShapeType="1"/>
-          </p:cNvCxnSpPr>
-          <p:nvPr>
-            <p:extLst>
-              <p:ext uri="{386F3935-93C4-4BCD-93E2-E3B085C9AB24}">
-                <p16:designElem xmlns:p16="http://schemas.microsoft.com/office/powerpoint/2015/main" val="1"/>
-              </p:ext>
-            </p:extLst>
-          </p:nvPr>
-        </p:nvCxnSpPr>
-        <p:spPr>
-          <a:xfrm>
-            <a:off x="482600" y="489855"/>
-            <a:ext cx="11147071" cy="0"/>
-          </a:xfrm>
-          <a:prstGeom prst="line">
-            <a:avLst/>
-          </a:prstGeom>
-          <a:ln w="28575">
-            <a:solidFill>
-              <a:schemeClr val="tx1"/>
-            </a:solidFill>
-          </a:ln>
-        </p:spPr>
-        <p:style>
-          <a:lnRef idx="1">
-            <a:schemeClr val="dk1"/>
-          </a:lnRef>
-          <a:fillRef idx="0">
-            <a:schemeClr val="dk1"/>
-          </a:fillRef>
-          <a:effectRef idx="0">
-            <a:schemeClr val="dk1"/>
-          </a:effectRef>
-          <a:fontRef idx="minor">
-            <a:schemeClr val="tx1"/>
-          </a:fontRef>
-        </p:style>
-      </p:cxnSp>
-      <p:pic>
-        <p:nvPicPr>
-          <p:cNvPr id="3" name="Kép 2" descr="A képen szöveg, képernyőkép, rajzfilm, Mobiltelefon látható&#10;&#10;Előfordulhat, hogy a mesterséges intelligencia által létrehozott tartalom helytelen.">
-            <a:extLst>
-              <a:ext uri="{FF2B5EF4-FFF2-40B4-BE49-F238E27FC236}">
-                <a16:creationId xmlns:a16="http://schemas.microsoft.com/office/drawing/2014/main" id="{CA340605-142C-9D98-751B-D6BA85AB3ED4}"/>
-              </a:ext>
-            </a:extLst>
-          </p:cNvPr>
-          <p:cNvPicPr>
-            <a:picLocks noChangeAspect="1"/>
-          </p:cNvPicPr>
-          <p:nvPr/>
-        </p:nvPicPr>
-        <p:blipFill>
-          <a:blip r:embed="rId3">
-            <a:alphaModFix/>
-          </a:blip>
-          <a:stretch>
-            <a:fillRect/>
-          </a:stretch>
-        </p:blipFill>
-        <p:spPr>
-          <a:xfrm>
-            <a:off x="637715" y="668861"/>
-            <a:ext cx="4715871" cy="5523092"/>
-          </a:xfrm>
-          <a:prstGeom prst="rect">
-            <a:avLst/>
-          </a:prstGeom>
-          <a:ln>
-            <a:solidFill>
-              <a:schemeClr val="tx1"/>
-            </a:solidFill>
-          </a:ln>
-        </p:spPr>
-      </p:pic>
-      <p:cxnSp>
-        <p:nvCxnSpPr>
-          <p:cNvPr id="19" name="Straight Connector 18">
-            <a:extLst>
-              <a:ext uri="{FF2B5EF4-FFF2-40B4-BE49-F238E27FC236}">
-                <a16:creationId xmlns:a16="http://schemas.microsoft.com/office/drawing/2014/main" id="{02DB647E-7779-454B-9098-17E6CE33DDCB}"/>
-              </a:ext>
-              <a:ext uri="{C183D7F6-B498-43B3-948B-1728B52AA6E4}">
-                <adec:decorative xmlns:adec="http://schemas.microsoft.com/office/drawing/2017/decorative" val="1"/>
-              </a:ext>
-            </a:extLst>
-          </p:cNvPr>
-          <p:cNvCxnSpPr>
-            <a:cxnSpLocks noGrp="1" noRot="1" noChangeAspect="1" noMove="1" noResize="1" noEditPoints="1" noAdjustHandles="1" noChangeArrowheads="1" noChangeShapeType="1"/>
-          </p:cNvCxnSpPr>
-          <p:nvPr>
-            <p:extLst>
-              <p:ext uri="{386F3935-93C4-4BCD-93E2-E3B085C9AB24}">
-                <p16:designElem xmlns:p16="http://schemas.microsoft.com/office/powerpoint/2015/main" val="1"/>
-              </p:ext>
-            </p:extLst>
-          </p:nvPr>
-        </p:nvCxnSpPr>
-        <p:spPr>
-          <a:xfrm>
-            <a:off x="482600" y="6368138"/>
-            <a:ext cx="11147071" cy="0"/>
-          </a:xfrm>
-          <a:prstGeom prst="line">
-            <a:avLst/>
-          </a:prstGeom>
-          <a:ln w="28575">
-            <a:solidFill>
-              <a:schemeClr val="tx1"/>
-            </a:solidFill>
-          </a:ln>
-        </p:spPr>
-        <p:style>
-          <a:lnRef idx="1">
-            <a:schemeClr val="dk1"/>
-          </a:lnRef>
-          <a:fillRef idx="0">
-            <a:schemeClr val="dk1"/>
-          </a:fillRef>
-          <a:effectRef idx="0">
-            <a:schemeClr val="dk1"/>
-          </a:effectRef>
-          <a:fontRef idx="minor">
-            <a:schemeClr val="tx1"/>
-          </a:fontRef>
-        </p:style>
-      </p:cxnSp>
-    </p:spTree>
-    <p:extLst>
-      <p:ext uri="{BB962C8B-B14F-4D97-AF65-F5344CB8AC3E}">
-        <p14:creationId xmlns:p14="http://schemas.microsoft.com/office/powerpoint/2010/main" val="2059224853"/>
-      </p:ext>
-    </p:extLst>
-  </p:cSld>
-  <p:clrMapOvr>
-    <a:masterClrMapping/>
-  </p:clrMapOvr>
-</p:sld>
-</file>
-
-<file path=ppt/slides/slide11.xml><?xml version="1.0" encoding="utf-8"?>
-<p:sld xmlns:a="http://schemas.openxmlformats.org/drawingml/2006/main" xmlns:r="http://schemas.openxmlformats.org/officeDocument/2006/relationships" xmlns:p="http://schemas.openxmlformats.org/presentationml/2006/main">
-  <p:cSld>
     <p:spTree>
       <p:nvGrpSpPr>
         <p:cNvPr id="1" name=""/>
@@ -9181,7 +8733,7 @@
 </p:sld>
 </file>
 
-<file path=ppt/slides/slide12.xml><?xml version="1.0" encoding="utf-8"?>
+<file path=ppt/slides/slide11.xml><?xml version="1.0" encoding="utf-8"?>
 <p:sld xmlns:a="http://schemas.openxmlformats.org/drawingml/2006/main" xmlns:r="http://schemas.openxmlformats.org/officeDocument/2006/relationships" xmlns:p="http://schemas.openxmlformats.org/presentationml/2006/main">
   <p:cSld>
     <p:bg>
@@ -9453,6 +9005,395 @@
     <p:extLst>
       <p:ext uri="{BB962C8B-B14F-4D97-AF65-F5344CB8AC3E}">
         <p14:creationId xmlns:p14="http://schemas.microsoft.com/office/powerpoint/2010/main" val="1035785621"/>
+      </p:ext>
+    </p:extLst>
+  </p:cSld>
+  <p:clrMapOvr>
+    <a:masterClrMapping/>
+  </p:clrMapOvr>
+</p:sld>
+</file>
+
+<file path=ppt/slides/slide12.xml><?xml version="1.0" encoding="utf-8"?>
+<p:sld xmlns:a="http://schemas.openxmlformats.org/drawingml/2006/main" xmlns:r="http://schemas.openxmlformats.org/officeDocument/2006/relationships" xmlns:p="http://schemas.openxmlformats.org/presentationml/2006/main">
+  <p:cSld>
+    <p:bg>
+      <p:bgPr>
+        <a:solidFill>
+          <a:schemeClr val="bg1"/>
+        </a:solidFill>
+        <a:effectLst/>
+      </p:bgPr>
+    </p:bg>
+    <p:spTree>
+      <p:nvGrpSpPr>
+        <p:cNvPr id="1" name=""/>
+        <p:cNvGrpSpPr/>
+        <p:nvPr/>
+      </p:nvGrpSpPr>
+      <p:grpSpPr>
+        <a:xfrm>
+          <a:off x="0" y="0"/>
+          <a:ext cx="0" cy="0"/>
+          <a:chOff x="0" y="0"/>
+          <a:chExt cx="0" cy="0"/>
+        </a:xfrm>
+      </p:grpSpPr>
+      <p:sp useBgFill="1">
+        <p:nvSpPr>
+          <p:cNvPr id="11" name="Rectangle 10">
+            <a:extLst>
+              <a:ext uri="{FF2B5EF4-FFF2-40B4-BE49-F238E27FC236}">
+                <a16:creationId xmlns:a16="http://schemas.microsoft.com/office/drawing/2014/main" id="{92B0CFF1-78D7-4A83-A95E-71F9E3831622}"/>
+              </a:ext>
+              <a:ext uri="{C183D7F6-B498-43B3-948B-1728B52AA6E4}">
+                <adec:decorative xmlns:adec="http://schemas.microsoft.com/office/drawing/2017/decorative" val="1"/>
+              </a:ext>
+            </a:extLst>
+          </p:cNvPr>
+          <p:cNvSpPr>
+            <a:spLocks noGrp="1" noRot="1" noChangeAspect="1" noMove="1" noResize="1" noEditPoints="1" noAdjustHandles="1" noChangeArrowheads="1" noChangeShapeType="1" noTextEdit="1"/>
+          </p:cNvSpPr>
+          <p:nvPr>
+            <p:extLst>
+              <p:ext uri="{386F3935-93C4-4BCD-93E2-E3B085C9AB24}">
+                <p16:designElem xmlns:p16="http://schemas.microsoft.com/office/powerpoint/2015/main" val="1"/>
+              </p:ext>
+            </p:extLst>
+          </p:nvPr>
+        </p:nvSpPr>
+        <p:spPr>
+          <a:xfrm>
+            <a:off x="0" y="0"/>
+            <a:ext cx="12192000" cy="6858001"/>
+          </a:xfrm>
+          <a:prstGeom prst="rect">
+            <a:avLst/>
+          </a:prstGeom>
+          <a:ln>
+            <a:noFill/>
+          </a:ln>
+        </p:spPr>
+        <p:style>
+          <a:lnRef idx="2">
+            <a:schemeClr val="accent1">
+              <a:shade val="50000"/>
+            </a:schemeClr>
+          </a:lnRef>
+          <a:fillRef idx="1">
+            <a:schemeClr val="accent1"/>
+          </a:fillRef>
+          <a:effectRef idx="0">
+            <a:schemeClr val="accent1"/>
+          </a:effectRef>
+          <a:fontRef idx="minor">
+            <a:schemeClr val="lt1"/>
+          </a:fontRef>
+        </p:style>
+        <p:txBody>
+          <a:bodyPr rtlCol="0" anchor="ctr"/>
+          <a:lstStyle/>
+          <a:p>
+            <a:pPr algn="ctr"/>
+            <a:endParaRPr lang="en-US" dirty="0"/>
+          </a:p>
+        </p:txBody>
+      </p:sp>
+      <p:sp>
+        <p:nvSpPr>
+          <p:cNvPr id="13" name="Rectangle 12">
+            <a:extLst>
+              <a:ext uri="{FF2B5EF4-FFF2-40B4-BE49-F238E27FC236}">
+                <a16:creationId xmlns:a16="http://schemas.microsoft.com/office/drawing/2014/main" id="{C12927E5-081D-440D-A775-C0AE9DA1E3EC}"/>
+              </a:ext>
+              <a:ext uri="{C183D7F6-B498-43B3-948B-1728B52AA6E4}">
+                <adec:decorative xmlns:adec="http://schemas.microsoft.com/office/drawing/2017/decorative" val="1"/>
+              </a:ext>
+            </a:extLst>
+          </p:cNvPr>
+          <p:cNvSpPr>
+            <a:spLocks noGrp="1" noRot="1" noChangeAspect="1" noMove="1" noResize="1" noEditPoints="1" noAdjustHandles="1" noChangeArrowheads="1" noChangeShapeType="1" noTextEdit="1"/>
+          </p:cNvSpPr>
+          <p:nvPr>
+            <p:extLst>
+              <p:ext uri="{386F3935-93C4-4BCD-93E2-E3B085C9AB24}">
+                <p16:designElem xmlns:p16="http://schemas.microsoft.com/office/powerpoint/2015/main" val="1"/>
+              </p:ext>
+            </p:extLst>
+          </p:nvPr>
+        </p:nvSpPr>
+        <p:spPr>
+          <a:xfrm>
+            <a:off x="481007" y="489856"/>
+            <a:ext cx="11147071" cy="1476642"/>
+          </a:xfrm>
+          <a:prstGeom prst="rect">
+            <a:avLst/>
+          </a:prstGeom>
+          <a:solidFill>
+            <a:schemeClr val="accent1">
+              <a:alpha val="10000"/>
+            </a:schemeClr>
+          </a:solidFill>
+          <a:ln>
+            <a:noFill/>
+          </a:ln>
+        </p:spPr>
+        <p:style>
+          <a:lnRef idx="2">
+            <a:schemeClr val="accent1">
+              <a:shade val="50000"/>
+            </a:schemeClr>
+          </a:lnRef>
+          <a:fillRef idx="1">
+            <a:schemeClr val="accent1"/>
+          </a:fillRef>
+          <a:effectRef idx="0">
+            <a:schemeClr val="accent1"/>
+          </a:effectRef>
+          <a:fontRef idx="minor">
+            <a:schemeClr val="lt1"/>
+          </a:fontRef>
+        </p:style>
+        <p:txBody>
+          <a:bodyPr rtlCol="0" anchor="ctr"/>
+          <a:lstStyle/>
+          <a:p>
+            <a:pPr algn="ctr"/>
+            <a:endParaRPr lang="en-US"/>
+          </a:p>
+        </p:txBody>
+      </p:sp>
+      <p:sp>
+        <p:nvSpPr>
+          <p:cNvPr id="2" name="Cím 1">
+            <a:extLst>
+              <a:ext uri="{FF2B5EF4-FFF2-40B4-BE49-F238E27FC236}">
+                <a16:creationId xmlns:a16="http://schemas.microsoft.com/office/drawing/2014/main" id="{007D22EB-34F2-D70C-07E0-5F2778518278}"/>
+              </a:ext>
+            </a:extLst>
+          </p:cNvPr>
+          <p:cNvSpPr>
+            <a:spLocks noGrp="1"/>
+          </p:cNvSpPr>
+          <p:nvPr>
+            <p:ph type="title"/>
+          </p:nvPr>
+        </p:nvSpPr>
+        <p:spPr>
+          <a:xfrm>
+            <a:off x="482601" y="721946"/>
+            <a:ext cx="10813250" cy="1022100"/>
+          </a:xfrm>
+        </p:spPr>
+        <p:txBody>
+          <a:bodyPr>
+            <a:normAutofit/>
+          </a:bodyPr>
+          <a:lstStyle/>
+          <a:p>
+            <a:pPr>
+              <a:lnSpc>
+                <a:spcPct val="90000"/>
+              </a:lnSpc>
+            </a:pPr>
+            <a:r>
+              <a:rPr lang="hu-HU"/>
+              <a:t>Adatbázis terv</a:t>
+            </a:r>
+          </a:p>
+        </p:txBody>
+      </p:sp>
+      <p:cxnSp>
+        <p:nvCxnSpPr>
+          <p:cNvPr id="15" name="Straight Connector 14">
+            <a:extLst>
+              <a:ext uri="{FF2B5EF4-FFF2-40B4-BE49-F238E27FC236}">
+                <a16:creationId xmlns:a16="http://schemas.microsoft.com/office/drawing/2014/main" id="{22CDD0E7-BDD6-41F4-8AAB-088A2E8D0367}"/>
+              </a:ext>
+              <a:ext uri="{C183D7F6-B498-43B3-948B-1728B52AA6E4}">
+                <adec:decorative xmlns:adec="http://schemas.microsoft.com/office/drawing/2017/decorative" val="1"/>
+              </a:ext>
+            </a:extLst>
+          </p:cNvPr>
+          <p:cNvCxnSpPr>
+            <a:cxnSpLocks noGrp="1" noRot="1" noChangeAspect="1" noMove="1" noResize="1" noEditPoints="1" noAdjustHandles="1" noChangeArrowheads="1" noChangeShapeType="1"/>
+          </p:cNvCxnSpPr>
+          <p:nvPr>
+            <p:extLst>
+              <p:ext uri="{386F3935-93C4-4BCD-93E2-E3B085C9AB24}">
+                <p16:designElem xmlns:p16="http://schemas.microsoft.com/office/powerpoint/2015/main" val="1"/>
+              </p:ext>
+            </p:extLst>
+          </p:nvPr>
+        </p:nvCxnSpPr>
+        <p:spPr>
+          <a:xfrm>
+            <a:off x="482600" y="489855"/>
+            <a:ext cx="11147071" cy="0"/>
+          </a:xfrm>
+          <a:prstGeom prst="line">
+            <a:avLst/>
+          </a:prstGeom>
+          <a:ln w="28575">
+            <a:solidFill>
+              <a:schemeClr val="tx1"/>
+            </a:solidFill>
+          </a:ln>
+        </p:spPr>
+        <p:style>
+          <a:lnRef idx="1">
+            <a:schemeClr val="dk1"/>
+          </a:lnRef>
+          <a:fillRef idx="0">
+            <a:schemeClr val="dk1"/>
+          </a:fillRef>
+          <a:effectRef idx="0">
+            <a:schemeClr val="dk1"/>
+          </a:effectRef>
+          <a:fontRef idx="minor">
+            <a:schemeClr val="tx1"/>
+          </a:fontRef>
+        </p:style>
+      </p:cxnSp>
+      <p:cxnSp>
+        <p:nvCxnSpPr>
+          <p:cNvPr id="17" name="Straight Connector 16">
+            <a:extLst>
+              <a:ext uri="{FF2B5EF4-FFF2-40B4-BE49-F238E27FC236}">
+                <a16:creationId xmlns:a16="http://schemas.microsoft.com/office/drawing/2014/main" id="{C4558310-C928-4426-BFAC-68450D291D0A}"/>
+              </a:ext>
+              <a:ext uri="{C183D7F6-B498-43B3-948B-1728B52AA6E4}">
+                <adec:decorative xmlns:adec="http://schemas.microsoft.com/office/drawing/2017/decorative" val="1"/>
+              </a:ext>
+            </a:extLst>
+          </p:cNvPr>
+          <p:cNvCxnSpPr>
+            <a:cxnSpLocks noGrp="1" noRot="1" noChangeAspect="1" noMove="1" noResize="1" noEditPoints="1" noAdjustHandles="1" noChangeArrowheads="1" noChangeShapeType="1"/>
+          </p:cNvCxnSpPr>
+          <p:nvPr>
+            <p:extLst>
+              <p:ext uri="{386F3935-93C4-4BCD-93E2-E3B085C9AB24}">
+                <p16:designElem xmlns:p16="http://schemas.microsoft.com/office/powerpoint/2015/main" val="1"/>
+              </p:ext>
+            </p:extLst>
+          </p:nvPr>
+        </p:nvCxnSpPr>
+        <p:spPr>
+          <a:xfrm>
+            <a:off x="482600" y="1993515"/>
+            <a:ext cx="11147071" cy="0"/>
+          </a:xfrm>
+          <a:prstGeom prst="line">
+            <a:avLst/>
+          </a:prstGeom>
+          <a:ln w="28575">
+            <a:solidFill>
+              <a:schemeClr val="tx1"/>
+            </a:solidFill>
+          </a:ln>
+        </p:spPr>
+        <p:style>
+          <a:lnRef idx="1">
+            <a:schemeClr val="dk1"/>
+          </a:lnRef>
+          <a:fillRef idx="0">
+            <a:schemeClr val="dk1"/>
+          </a:fillRef>
+          <a:effectRef idx="0">
+            <a:schemeClr val="dk1"/>
+          </a:effectRef>
+          <a:fontRef idx="minor">
+            <a:schemeClr val="tx1"/>
+          </a:fontRef>
+        </p:style>
+      </p:cxnSp>
+      <p:cxnSp>
+        <p:nvCxnSpPr>
+          <p:cNvPr id="19" name="Straight Connector 18">
+            <a:extLst>
+              <a:ext uri="{FF2B5EF4-FFF2-40B4-BE49-F238E27FC236}">
+                <a16:creationId xmlns:a16="http://schemas.microsoft.com/office/drawing/2014/main" id="{B58B45F5-E162-4AF7-9E46-A4290969B479}"/>
+              </a:ext>
+              <a:ext uri="{C183D7F6-B498-43B3-948B-1728B52AA6E4}">
+                <adec:decorative xmlns:adec="http://schemas.microsoft.com/office/drawing/2017/decorative" val="1"/>
+              </a:ext>
+            </a:extLst>
+          </p:cNvPr>
+          <p:cNvCxnSpPr>
+            <a:cxnSpLocks noGrp="1" noRot="1" noChangeAspect="1" noMove="1" noResize="1" noEditPoints="1" noAdjustHandles="1" noChangeArrowheads="1" noChangeShapeType="1"/>
+          </p:cNvCxnSpPr>
+          <p:nvPr>
+            <p:extLst>
+              <p:ext uri="{386F3935-93C4-4BCD-93E2-E3B085C9AB24}">
+                <p16:designElem xmlns:p16="http://schemas.microsoft.com/office/powerpoint/2015/main" val="1"/>
+              </p:ext>
+            </p:extLst>
+          </p:nvPr>
+        </p:nvCxnSpPr>
+        <p:spPr>
+          <a:xfrm>
+            <a:off x="482600" y="6368138"/>
+            <a:ext cx="11147071" cy="0"/>
+          </a:xfrm>
+          <a:prstGeom prst="line">
+            <a:avLst/>
+          </a:prstGeom>
+          <a:ln w="28575">
+            <a:solidFill>
+              <a:schemeClr val="tx1"/>
+            </a:solidFill>
+          </a:ln>
+        </p:spPr>
+        <p:style>
+          <a:lnRef idx="1">
+            <a:schemeClr val="dk1"/>
+          </a:lnRef>
+          <a:fillRef idx="0">
+            <a:schemeClr val="dk1"/>
+          </a:fillRef>
+          <a:effectRef idx="0">
+            <a:schemeClr val="dk1"/>
+          </a:effectRef>
+          <a:fontRef idx="minor">
+            <a:schemeClr val="tx1"/>
+          </a:fontRef>
+        </p:style>
+      </p:cxnSp>
+      <p:pic>
+        <p:nvPicPr>
+          <p:cNvPr id="5" name="Kép 4">
+            <a:extLst>
+              <a:ext uri="{FF2B5EF4-FFF2-40B4-BE49-F238E27FC236}">
+                <a16:creationId xmlns:a16="http://schemas.microsoft.com/office/drawing/2014/main" id="{353D6DC9-9D78-8F93-143B-31201CE273CA}"/>
+              </a:ext>
+            </a:extLst>
+          </p:cNvPr>
+          <p:cNvPicPr>
+            <a:picLocks noChangeAspect="1"/>
+          </p:cNvPicPr>
+          <p:nvPr/>
+        </p:nvPicPr>
+        <p:blipFill>
+          <a:blip r:embed="rId3"/>
+          <a:stretch>
+            <a:fillRect/>
+          </a:stretch>
+        </p:blipFill>
+        <p:spPr>
+          <a:xfrm>
+            <a:off x="180149" y="2020533"/>
+            <a:ext cx="11831701" cy="4320585"/>
+          </a:xfrm>
+          <a:prstGeom prst="rect">
+            <a:avLst/>
+          </a:prstGeom>
+        </p:spPr>
+      </p:pic>
+    </p:spTree>
+    <p:extLst>
+      <p:ext uri="{BB962C8B-B14F-4D97-AF65-F5344CB8AC3E}">
+        <p14:creationId xmlns:p14="http://schemas.microsoft.com/office/powerpoint/2010/main" val="3490231500"/>
       </p:ext>
     </p:extLst>
   </p:cSld>
@@ -9982,6 +9923,128 @@
       </p:grpSpPr>
       <p:sp>
         <p:nvSpPr>
+          <p:cNvPr id="3" name="Tartalom helye 2">
+            <a:extLst>
+              <a:ext uri="{FF2B5EF4-FFF2-40B4-BE49-F238E27FC236}">
+                <a16:creationId xmlns:a16="http://schemas.microsoft.com/office/drawing/2014/main" id="{018A105E-E4E9-01F0-24E9-90F91C8B218A}"/>
+              </a:ext>
+            </a:extLst>
+          </p:cNvPr>
+          <p:cNvSpPr>
+            <a:spLocks noGrp="1"/>
+          </p:cNvSpPr>
+          <p:nvPr>
+            <p:ph idx="1"/>
+          </p:nvPr>
+        </p:nvSpPr>
+        <p:spPr>
+          <a:xfrm>
+            <a:off x="630084" y="2313038"/>
+            <a:ext cx="4816987" cy="2231921"/>
+          </a:xfrm>
+        </p:spPr>
+        <p:txBody>
+          <a:bodyPr>
+            <a:noAutofit/>
+          </a:bodyPr>
+          <a:lstStyle/>
+          <a:p>
+            <a:r>
+              <a:rPr lang="hu-HU" sz="3200" dirty="0"/>
+              <a:t>Saját dokumentációnk is készült a projekt során, amelyet a </a:t>
+            </a:r>
+            <a:r>
+              <a:rPr lang="hu-HU" sz="3200" dirty="0" err="1"/>
+              <a:t>LaTeX</a:t>
+            </a:r>
+            <a:r>
+              <a:rPr lang="hu-HU" sz="3200" dirty="0"/>
+              <a:t>-ben, </a:t>
+            </a:r>
+            <a:r>
+              <a:rPr lang="hu-HU" sz="3200" dirty="0" err="1"/>
+              <a:t>Tex</a:t>
+            </a:r>
+            <a:r>
+              <a:rPr lang="hu-HU" sz="3200" dirty="0"/>
+              <a:t> stúdióban írtunk meg.</a:t>
+            </a:r>
+            <a:endParaRPr lang="en-US" sz="3200" dirty="0"/>
+          </a:p>
+        </p:txBody>
+      </p:sp>
+      <p:pic>
+        <p:nvPicPr>
+          <p:cNvPr id="7" name="Kép 6">
+            <a:extLst>
+              <a:ext uri="{FF2B5EF4-FFF2-40B4-BE49-F238E27FC236}">
+                <a16:creationId xmlns:a16="http://schemas.microsoft.com/office/drawing/2014/main" id="{07D4E66D-951E-DC03-3298-5B5F5B5422DE}"/>
+              </a:ext>
+            </a:extLst>
+          </p:cNvPr>
+          <p:cNvPicPr>
+            <a:picLocks noChangeAspect="1"/>
+          </p:cNvPicPr>
+          <p:nvPr/>
+        </p:nvPicPr>
+        <p:blipFill>
+          <a:blip r:embed="rId2"/>
+          <a:stretch>
+            <a:fillRect/>
+          </a:stretch>
+        </p:blipFill>
+        <p:spPr>
+          <a:xfrm>
+            <a:off x="6184490" y="594851"/>
+            <a:ext cx="5235073" cy="5668297"/>
+          </a:xfrm>
+          <a:prstGeom prst="rect">
+            <a:avLst/>
+          </a:prstGeom>
+          <a:ln>
+            <a:solidFill>
+              <a:schemeClr val="tx1"/>
+            </a:solidFill>
+          </a:ln>
+          <a:effectLst>
+            <a:outerShdw blurRad="50800" dist="50800" dir="5400000" algn="ctr" rotWithShape="0">
+              <a:schemeClr val="tx1"/>
+            </a:outerShdw>
+          </a:effectLst>
+        </p:spPr>
+      </p:pic>
+    </p:spTree>
+    <p:extLst>
+      <p:ext uri="{BB962C8B-B14F-4D97-AF65-F5344CB8AC3E}">
+        <p14:creationId xmlns:p14="http://schemas.microsoft.com/office/powerpoint/2010/main" val="2757855889"/>
+      </p:ext>
+    </p:extLst>
+  </p:cSld>
+  <p:clrMapOvr>
+    <a:masterClrMapping/>
+  </p:clrMapOvr>
+</p:sld>
+</file>
+
+<file path=ppt/slides/slide16.xml><?xml version="1.0" encoding="utf-8"?>
+<p:sld xmlns:a="http://schemas.openxmlformats.org/drawingml/2006/main" xmlns:r="http://schemas.openxmlformats.org/officeDocument/2006/relationships" xmlns:p="http://schemas.openxmlformats.org/presentationml/2006/main">
+  <p:cSld>
+    <p:spTree>
+      <p:nvGrpSpPr>
+        <p:cNvPr id="1" name=""/>
+        <p:cNvGrpSpPr/>
+        <p:nvPr/>
+      </p:nvGrpSpPr>
+      <p:grpSpPr>
+        <a:xfrm>
+          <a:off x="0" y="0"/>
+          <a:ext cx="0" cy="0"/>
+          <a:chOff x="0" y="0"/>
+          <a:chExt cx="0" cy="0"/>
+        </a:xfrm>
+      </p:grpSpPr>
+      <p:sp>
+        <p:nvSpPr>
           <p:cNvPr id="2" name="Cím 1">
             <a:extLst>
               <a:ext uri="{FF2B5EF4-FFF2-40B4-BE49-F238E27FC236}">
@@ -11249,395 +11312,6 @@
 <file path=ppt/slides/slide5.xml><?xml version="1.0" encoding="utf-8"?>
 <p:sld xmlns:a="http://schemas.openxmlformats.org/drawingml/2006/main" xmlns:r="http://schemas.openxmlformats.org/officeDocument/2006/relationships" xmlns:p="http://schemas.openxmlformats.org/presentationml/2006/main">
   <p:cSld>
-    <p:bg>
-      <p:bgPr>
-        <a:solidFill>
-          <a:schemeClr val="bg1"/>
-        </a:solidFill>
-        <a:effectLst/>
-      </p:bgPr>
-    </p:bg>
-    <p:spTree>
-      <p:nvGrpSpPr>
-        <p:cNvPr id="1" name=""/>
-        <p:cNvGrpSpPr/>
-        <p:nvPr/>
-      </p:nvGrpSpPr>
-      <p:grpSpPr>
-        <a:xfrm>
-          <a:off x="0" y="0"/>
-          <a:ext cx="0" cy="0"/>
-          <a:chOff x="0" y="0"/>
-          <a:chExt cx="0" cy="0"/>
-        </a:xfrm>
-      </p:grpSpPr>
-      <p:sp useBgFill="1">
-        <p:nvSpPr>
-          <p:cNvPr id="11" name="Rectangle 10">
-            <a:extLst>
-              <a:ext uri="{FF2B5EF4-FFF2-40B4-BE49-F238E27FC236}">
-                <a16:creationId xmlns:a16="http://schemas.microsoft.com/office/drawing/2014/main" id="{92B0CFF1-78D7-4A83-A95E-71F9E3831622}"/>
-              </a:ext>
-              <a:ext uri="{C183D7F6-B498-43B3-948B-1728B52AA6E4}">
-                <adec:decorative xmlns:adec="http://schemas.microsoft.com/office/drawing/2017/decorative" val="1"/>
-              </a:ext>
-            </a:extLst>
-          </p:cNvPr>
-          <p:cNvSpPr>
-            <a:spLocks noGrp="1" noRot="1" noChangeAspect="1" noMove="1" noResize="1" noEditPoints="1" noAdjustHandles="1" noChangeArrowheads="1" noChangeShapeType="1" noTextEdit="1"/>
-          </p:cNvSpPr>
-          <p:nvPr>
-            <p:extLst>
-              <p:ext uri="{386F3935-93C4-4BCD-93E2-E3B085C9AB24}">
-                <p16:designElem xmlns:p16="http://schemas.microsoft.com/office/powerpoint/2015/main" val="1"/>
-              </p:ext>
-            </p:extLst>
-          </p:nvPr>
-        </p:nvSpPr>
-        <p:spPr>
-          <a:xfrm>
-            <a:off x="0" y="0"/>
-            <a:ext cx="12192000" cy="6858001"/>
-          </a:xfrm>
-          <a:prstGeom prst="rect">
-            <a:avLst/>
-          </a:prstGeom>
-          <a:ln>
-            <a:noFill/>
-          </a:ln>
-        </p:spPr>
-        <p:style>
-          <a:lnRef idx="2">
-            <a:schemeClr val="accent1">
-              <a:shade val="50000"/>
-            </a:schemeClr>
-          </a:lnRef>
-          <a:fillRef idx="1">
-            <a:schemeClr val="accent1"/>
-          </a:fillRef>
-          <a:effectRef idx="0">
-            <a:schemeClr val="accent1"/>
-          </a:effectRef>
-          <a:fontRef idx="minor">
-            <a:schemeClr val="lt1"/>
-          </a:fontRef>
-        </p:style>
-        <p:txBody>
-          <a:bodyPr rtlCol="0" anchor="ctr"/>
-          <a:lstStyle/>
-          <a:p>
-            <a:pPr algn="ctr"/>
-            <a:endParaRPr lang="en-US" dirty="0"/>
-          </a:p>
-        </p:txBody>
-      </p:sp>
-      <p:sp>
-        <p:nvSpPr>
-          <p:cNvPr id="13" name="Rectangle 12">
-            <a:extLst>
-              <a:ext uri="{FF2B5EF4-FFF2-40B4-BE49-F238E27FC236}">
-                <a16:creationId xmlns:a16="http://schemas.microsoft.com/office/drawing/2014/main" id="{C12927E5-081D-440D-A775-C0AE9DA1E3EC}"/>
-              </a:ext>
-              <a:ext uri="{C183D7F6-B498-43B3-948B-1728B52AA6E4}">
-                <adec:decorative xmlns:adec="http://schemas.microsoft.com/office/drawing/2017/decorative" val="1"/>
-              </a:ext>
-            </a:extLst>
-          </p:cNvPr>
-          <p:cNvSpPr>
-            <a:spLocks noGrp="1" noRot="1" noChangeAspect="1" noMove="1" noResize="1" noEditPoints="1" noAdjustHandles="1" noChangeArrowheads="1" noChangeShapeType="1" noTextEdit="1"/>
-          </p:cNvSpPr>
-          <p:nvPr>
-            <p:extLst>
-              <p:ext uri="{386F3935-93C4-4BCD-93E2-E3B085C9AB24}">
-                <p16:designElem xmlns:p16="http://schemas.microsoft.com/office/powerpoint/2015/main" val="1"/>
-              </p:ext>
-            </p:extLst>
-          </p:nvPr>
-        </p:nvSpPr>
-        <p:spPr>
-          <a:xfrm>
-            <a:off x="481007" y="489856"/>
-            <a:ext cx="11147071" cy="1476642"/>
-          </a:xfrm>
-          <a:prstGeom prst="rect">
-            <a:avLst/>
-          </a:prstGeom>
-          <a:solidFill>
-            <a:schemeClr val="accent1">
-              <a:alpha val="10000"/>
-            </a:schemeClr>
-          </a:solidFill>
-          <a:ln>
-            <a:noFill/>
-          </a:ln>
-        </p:spPr>
-        <p:style>
-          <a:lnRef idx="2">
-            <a:schemeClr val="accent1">
-              <a:shade val="50000"/>
-            </a:schemeClr>
-          </a:lnRef>
-          <a:fillRef idx="1">
-            <a:schemeClr val="accent1"/>
-          </a:fillRef>
-          <a:effectRef idx="0">
-            <a:schemeClr val="accent1"/>
-          </a:effectRef>
-          <a:fontRef idx="minor">
-            <a:schemeClr val="lt1"/>
-          </a:fontRef>
-        </p:style>
-        <p:txBody>
-          <a:bodyPr rtlCol="0" anchor="ctr"/>
-          <a:lstStyle/>
-          <a:p>
-            <a:pPr algn="ctr"/>
-            <a:endParaRPr lang="en-US"/>
-          </a:p>
-        </p:txBody>
-      </p:sp>
-      <p:sp>
-        <p:nvSpPr>
-          <p:cNvPr id="2" name="Cím 1">
-            <a:extLst>
-              <a:ext uri="{FF2B5EF4-FFF2-40B4-BE49-F238E27FC236}">
-                <a16:creationId xmlns:a16="http://schemas.microsoft.com/office/drawing/2014/main" id="{007D22EB-34F2-D70C-07E0-5F2778518278}"/>
-              </a:ext>
-            </a:extLst>
-          </p:cNvPr>
-          <p:cNvSpPr>
-            <a:spLocks noGrp="1"/>
-          </p:cNvSpPr>
-          <p:nvPr>
-            <p:ph type="title"/>
-          </p:nvPr>
-        </p:nvSpPr>
-        <p:spPr>
-          <a:xfrm>
-            <a:off x="482601" y="721946"/>
-            <a:ext cx="10813250" cy="1022100"/>
-          </a:xfrm>
-        </p:spPr>
-        <p:txBody>
-          <a:bodyPr>
-            <a:normAutofit/>
-          </a:bodyPr>
-          <a:lstStyle/>
-          <a:p>
-            <a:pPr>
-              <a:lnSpc>
-                <a:spcPct val="90000"/>
-              </a:lnSpc>
-            </a:pPr>
-            <a:r>
-              <a:rPr lang="hu-HU"/>
-              <a:t>Adatbázis terv</a:t>
-            </a:r>
-          </a:p>
-        </p:txBody>
-      </p:sp>
-      <p:cxnSp>
-        <p:nvCxnSpPr>
-          <p:cNvPr id="15" name="Straight Connector 14">
-            <a:extLst>
-              <a:ext uri="{FF2B5EF4-FFF2-40B4-BE49-F238E27FC236}">
-                <a16:creationId xmlns:a16="http://schemas.microsoft.com/office/drawing/2014/main" id="{22CDD0E7-BDD6-41F4-8AAB-088A2E8D0367}"/>
-              </a:ext>
-              <a:ext uri="{C183D7F6-B498-43B3-948B-1728B52AA6E4}">
-                <adec:decorative xmlns:adec="http://schemas.microsoft.com/office/drawing/2017/decorative" val="1"/>
-              </a:ext>
-            </a:extLst>
-          </p:cNvPr>
-          <p:cNvCxnSpPr>
-            <a:cxnSpLocks noGrp="1" noRot="1" noChangeAspect="1" noMove="1" noResize="1" noEditPoints="1" noAdjustHandles="1" noChangeArrowheads="1" noChangeShapeType="1"/>
-          </p:cNvCxnSpPr>
-          <p:nvPr>
-            <p:extLst>
-              <p:ext uri="{386F3935-93C4-4BCD-93E2-E3B085C9AB24}">
-                <p16:designElem xmlns:p16="http://schemas.microsoft.com/office/powerpoint/2015/main" val="1"/>
-              </p:ext>
-            </p:extLst>
-          </p:nvPr>
-        </p:nvCxnSpPr>
-        <p:spPr>
-          <a:xfrm>
-            <a:off x="482600" y="489855"/>
-            <a:ext cx="11147071" cy="0"/>
-          </a:xfrm>
-          <a:prstGeom prst="line">
-            <a:avLst/>
-          </a:prstGeom>
-          <a:ln w="28575">
-            <a:solidFill>
-              <a:schemeClr val="tx1"/>
-            </a:solidFill>
-          </a:ln>
-        </p:spPr>
-        <p:style>
-          <a:lnRef idx="1">
-            <a:schemeClr val="dk1"/>
-          </a:lnRef>
-          <a:fillRef idx="0">
-            <a:schemeClr val="dk1"/>
-          </a:fillRef>
-          <a:effectRef idx="0">
-            <a:schemeClr val="dk1"/>
-          </a:effectRef>
-          <a:fontRef idx="minor">
-            <a:schemeClr val="tx1"/>
-          </a:fontRef>
-        </p:style>
-      </p:cxnSp>
-      <p:cxnSp>
-        <p:nvCxnSpPr>
-          <p:cNvPr id="17" name="Straight Connector 16">
-            <a:extLst>
-              <a:ext uri="{FF2B5EF4-FFF2-40B4-BE49-F238E27FC236}">
-                <a16:creationId xmlns:a16="http://schemas.microsoft.com/office/drawing/2014/main" id="{C4558310-C928-4426-BFAC-68450D291D0A}"/>
-              </a:ext>
-              <a:ext uri="{C183D7F6-B498-43B3-948B-1728B52AA6E4}">
-                <adec:decorative xmlns:adec="http://schemas.microsoft.com/office/drawing/2017/decorative" val="1"/>
-              </a:ext>
-            </a:extLst>
-          </p:cNvPr>
-          <p:cNvCxnSpPr>
-            <a:cxnSpLocks noGrp="1" noRot="1" noChangeAspect="1" noMove="1" noResize="1" noEditPoints="1" noAdjustHandles="1" noChangeArrowheads="1" noChangeShapeType="1"/>
-          </p:cNvCxnSpPr>
-          <p:nvPr>
-            <p:extLst>
-              <p:ext uri="{386F3935-93C4-4BCD-93E2-E3B085C9AB24}">
-                <p16:designElem xmlns:p16="http://schemas.microsoft.com/office/powerpoint/2015/main" val="1"/>
-              </p:ext>
-            </p:extLst>
-          </p:nvPr>
-        </p:nvCxnSpPr>
-        <p:spPr>
-          <a:xfrm>
-            <a:off x="482600" y="1993515"/>
-            <a:ext cx="11147071" cy="0"/>
-          </a:xfrm>
-          <a:prstGeom prst="line">
-            <a:avLst/>
-          </a:prstGeom>
-          <a:ln w="28575">
-            <a:solidFill>
-              <a:schemeClr val="tx1"/>
-            </a:solidFill>
-          </a:ln>
-        </p:spPr>
-        <p:style>
-          <a:lnRef idx="1">
-            <a:schemeClr val="dk1"/>
-          </a:lnRef>
-          <a:fillRef idx="0">
-            <a:schemeClr val="dk1"/>
-          </a:fillRef>
-          <a:effectRef idx="0">
-            <a:schemeClr val="dk1"/>
-          </a:effectRef>
-          <a:fontRef idx="minor">
-            <a:schemeClr val="tx1"/>
-          </a:fontRef>
-        </p:style>
-      </p:cxnSp>
-      <p:cxnSp>
-        <p:nvCxnSpPr>
-          <p:cNvPr id="19" name="Straight Connector 18">
-            <a:extLst>
-              <a:ext uri="{FF2B5EF4-FFF2-40B4-BE49-F238E27FC236}">
-                <a16:creationId xmlns:a16="http://schemas.microsoft.com/office/drawing/2014/main" id="{B58B45F5-E162-4AF7-9E46-A4290969B479}"/>
-              </a:ext>
-              <a:ext uri="{C183D7F6-B498-43B3-948B-1728B52AA6E4}">
-                <adec:decorative xmlns:adec="http://schemas.microsoft.com/office/drawing/2017/decorative" val="1"/>
-              </a:ext>
-            </a:extLst>
-          </p:cNvPr>
-          <p:cNvCxnSpPr>
-            <a:cxnSpLocks noGrp="1" noRot="1" noChangeAspect="1" noMove="1" noResize="1" noEditPoints="1" noAdjustHandles="1" noChangeArrowheads="1" noChangeShapeType="1"/>
-          </p:cNvCxnSpPr>
-          <p:nvPr>
-            <p:extLst>
-              <p:ext uri="{386F3935-93C4-4BCD-93E2-E3B085C9AB24}">
-                <p16:designElem xmlns:p16="http://schemas.microsoft.com/office/powerpoint/2015/main" val="1"/>
-              </p:ext>
-            </p:extLst>
-          </p:nvPr>
-        </p:nvCxnSpPr>
-        <p:spPr>
-          <a:xfrm>
-            <a:off x="482600" y="6368138"/>
-            <a:ext cx="11147071" cy="0"/>
-          </a:xfrm>
-          <a:prstGeom prst="line">
-            <a:avLst/>
-          </a:prstGeom>
-          <a:ln w="28575">
-            <a:solidFill>
-              <a:schemeClr val="tx1"/>
-            </a:solidFill>
-          </a:ln>
-        </p:spPr>
-        <p:style>
-          <a:lnRef idx="1">
-            <a:schemeClr val="dk1"/>
-          </a:lnRef>
-          <a:fillRef idx="0">
-            <a:schemeClr val="dk1"/>
-          </a:fillRef>
-          <a:effectRef idx="0">
-            <a:schemeClr val="dk1"/>
-          </a:effectRef>
-          <a:fontRef idx="minor">
-            <a:schemeClr val="tx1"/>
-          </a:fontRef>
-        </p:style>
-      </p:cxnSp>
-      <p:pic>
-        <p:nvPicPr>
-          <p:cNvPr id="5" name="Kép 4">
-            <a:extLst>
-              <a:ext uri="{FF2B5EF4-FFF2-40B4-BE49-F238E27FC236}">
-                <a16:creationId xmlns:a16="http://schemas.microsoft.com/office/drawing/2014/main" id="{353D6DC9-9D78-8F93-143B-31201CE273CA}"/>
-              </a:ext>
-            </a:extLst>
-          </p:cNvPr>
-          <p:cNvPicPr>
-            <a:picLocks noChangeAspect="1"/>
-          </p:cNvPicPr>
-          <p:nvPr/>
-        </p:nvPicPr>
-        <p:blipFill>
-          <a:blip r:embed="rId3"/>
-          <a:stretch>
-            <a:fillRect/>
-          </a:stretch>
-        </p:blipFill>
-        <p:spPr>
-          <a:xfrm>
-            <a:off x="180149" y="2020533"/>
-            <a:ext cx="11831701" cy="4320585"/>
-          </a:xfrm>
-          <a:prstGeom prst="rect">
-            <a:avLst/>
-          </a:prstGeom>
-        </p:spPr>
-      </p:pic>
-    </p:spTree>
-    <p:extLst>
-      <p:ext uri="{BB962C8B-B14F-4D97-AF65-F5344CB8AC3E}">
-        <p14:creationId xmlns:p14="http://schemas.microsoft.com/office/powerpoint/2010/main" val="3490231500"/>
-      </p:ext>
-    </p:extLst>
-  </p:cSld>
-  <p:clrMapOvr>
-    <a:masterClrMapping/>
-  </p:clrMapOvr>
-</p:sld>
-</file>
-
-<file path=ppt/slides/slide6.xml><?xml version="1.0" encoding="utf-8"?>
-<p:sld xmlns:a="http://schemas.openxmlformats.org/drawingml/2006/main" xmlns:r="http://schemas.openxmlformats.org/officeDocument/2006/relationships" xmlns:p="http://schemas.openxmlformats.org/presentationml/2006/main">
-  <p:cSld>
     <p:spTree>
       <p:nvGrpSpPr>
         <p:cNvPr id="1" name=""/>
@@ -11726,7 +11400,15 @@
             </a:r>
             <a:r>
               <a:rPr lang="en-US" dirty="0"/>
-              <a:t> ASP.NET </a:t>
+              <a:t> </a:t>
+            </a:r>
+            <a:r>
+              <a:rPr lang="en-US" dirty="0" err="1"/>
+              <a:t>ASP.NET</a:t>
+            </a:r>
+            <a:r>
+              <a:rPr lang="en-US" dirty="0"/>
+              <a:t> </a:t>
             </a:r>
             <a:r>
               <a:rPr lang="en-US" dirty="0" err="1"/>
@@ -11762,7 +11444,15 @@
             </a:r>
             <a:r>
               <a:rPr lang="en-US" dirty="0" err="1"/>
-              <a:t>valócsatlakozáshoz</a:t>
+              <a:t>való</a:t>
+            </a:r>
+            <a:r>
+              <a:rPr lang="hu-HU" dirty="0"/>
+              <a:t> </a:t>
+            </a:r>
+            <a:r>
+              <a:rPr lang="en-US" dirty="0" err="1"/>
+              <a:t>csatlakozáshoz</a:t>
             </a:r>
             <a:r>
               <a:rPr lang="hu-HU" dirty="0"/>
@@ -12062,7 +11752,7 @@
             <a:pPr algn="ctr"/>
             <a:r>
               <a:rPr lang="hu-HU" sz="2400" dirty="0"/>
-              <a:t>Verzió kezelés és adatok tárolása</a:t>
+              <a:t>Adatbázis, Verzió kezelés és adatok tárolása</a:t>
             </a:r>
             <a:endParaRPr lang="en-US" sz="2400" dirty="0"/>
           </a:p>
@@ -12083,7 +11773,7 @@
         <p:spPr>
           <a:xfrm>
             <a:off x="8148119" y="2967335"/>
-            <a:ext cx="3630439" cy="923330"/>
+            <a:ext cx="3630439" cy="1200329"/>
           </a:xfrm>
           <a:prstGeom prst="rect">
             <a:avLst/>
@@ -12106,7 +11796,15 @@
             </a:r>
             <a:r>
               <a:rPr lang="hu-HU" dirty="0"/>
-              <a:t> tároljuk és kezeljünk annak verzióit.</a:t>
+              <a:t> tároljuk és kezeljünk annak verzióit. Az adatbázisunk pedig </a:t>
+            </a:r>
+            <a:r>
+              <a:rPr lang="hu-HU" dirty="0" err="1"/>
+              <a:t>MySQL</a:t>
+            </a:r>
+            <a:r>
+              <a:rPr lang="hu-HU" dirty="0"/>
+              <a:t>-ben lett elkészítve.</a:t>
             </a:r>
             <a:endParaRPr lang="en-US" dirty="0"/>
           </a:p>
@@ -12125,7 +11823,7 @@
 </p:sld>
 </file>
 
-<file path=ppt/slides/slide7.xml><?xml version="1.0" encoding="utf-8"?>
+<file path=ppt/slides/slide6.xml><?xml version="1.0" encoding="utf-8"?>
 <p:sld xmlns:a="http://schemas.openxmlformats.org/drawingml/2006/main" xmlns:r="http://schemas.openxmlformats.org/officeDocument/2006/relationships" xmlns:p="http://schemas.openxmlformats.org/presentationml/2006/main">
   <p:cSld>
     <p:bg>
@@ -12613,7 +12311,7 @@
 </p:sld>
 </file>
 
-<file path=ppt/slides/slide8.xml><?xml version="1.0" encoding="utf-8"?>
+<file path=ppt/slides/slide7.xml><?xml version="1.0" encoding="utf-8"?>
 <p:sld xmlns:a="http://schemas.openxmlformats.org/drawingml/2006/main" xmlns:r="http://schemas.openxmlformats.org/officeDocument/2006/relationships" xmlns:p="http://schemas.openxmlformats.org/presentationml/2006/main">
   <p:cSld>
     <p:bg>
@@ -13027,7 +12725,7 @@
 </p:sld>
 </file>
 
-<file path=ppt/slides/slide9.xml><?xml version="1.0" encoding="utf-8"?>
+<file path=ppt/slides/slide8.xml><?xml version="1.0" encoding="utf-8"?>
 <p:sld xmlns:a="http://schemas.openxmlformats.org/drawingml/2006/main" xmlns:r="http://schemas.openxmlformats.org/officeDocument/2006/relationships" xmlns:p="http://schemas.openxmlformats.org/presentationml/2006/main">
   <p:cSld>
     <p:spTree>
@@ -13122,6 +12820,455 @@
     <p:extLst>
       <p:ext uri="{BB962C8B-B14F-4D97-AF65-F5344CB8AC3E}">
         <p14:creationId xmlns:p14="http://schemas.microsoft.com/office/powerpoint/2010/main" val="3278023332"/>
+      </p:ext>
+    </p:extLst>
+  </p:cSld>
+  <p:clrMapOvr>
+    <a:masterClrMapping/>
+  </p:clrMapOvr>
+</p:sld>
+</file>
+
+<file path=ppt/slides/slide9.xml><?xml version="1.0" encoding="utf-8"?>
+<p:sld xmlns:a="http://schemas.openxmlformats.org/drawingml/2006/main" xmlns:r="http://schemas.openxmlformats.org/officeDocument/2006/relationships" xmlns:p="http://schemas.openxmlformats.org/presentationml/2006/main">
+  <p:cSld>
+    <p:bg>
+      <p:bgPr>
+        <a:solidFill>
+          <a:schemeClr val="bg1"/>
+        </a:solidFill>
+        <a:effectLst/>
+      </p:bgPr>
+    </p:bg>
+    <p:spTree>
+      <p:nvGrpSpPr>
+        <p:cNvPr id="1" name=""/>
+        <p:cNvGrpSpPr/>
+        <p:nvPr/>
+      </p:nvGrpSpPr>
+      <p:grpSpPr>
+        <a:xfrm>
+          <a:off x="0" y="0"/>
+          <a:ext cx="0" cy="0"/>
+          <a:chOff x="0" y="0"/>
+          <a:chExt cx="0" cy="0"/>
+        </a:xfrm>
+      </p:grpSpPr>
+      <p:cxnSp>
+        <p:nvCxnSpPr>
+          <p:cNvPr id="9" name="Straight Connector 8">
+            <a:extLst>
+              <a:ext uri="{FF2B5EF4-FFF2-40B4-BE49-F238E27FC236}">
+                <a16:creationId xmlns:a16="http://schemas.microsoft.com/office/drawing/2014/main" id="{108D74AC-B125-4E11-BA53-E9E383966DF8}"/>
+              </a:ext>
+              <a:ext uri="{C183D7F6-B498-43B3-948B-1728B52AA6E4}">
+                <adec:decorative xmlns:adec="http://schemas.microsoft.com/office/drawing/2017/decorative" val="1"/>
+              </a:ext>
+            </a:extLst>
+          </p:cNvPr>
+          <p:cNvCxnSpPr>
+            <a:cxnSpLocks noGrp="1" noRot="1" noChangeAspect="1" noMove="1" noResize="1" noEditPoints="1" noAdjustHandles="1" noChangeArrowheads="1" noChangeShapeType="1"/>
+          </p:cNvCxnSpPr>
+          <p:nvPr>
+            <p:extLst>
+              <p:ext uri="{386F3935-93C4-4BCD-93E2-E3B085C9AB24}">
+                <p16:designElem xmlns:p16="http://schemas.microsoft.com/office/powerpoint/2015/main" val="1"/>
+              </p:ext>
+            </p:extLst>
+          </p:nvPr>
+        </p:nvCxnSpPr>
+        <p:spPr>
+          <a:xfrm>
+            <a:off x="482600" y="489855"/>
+            <a:ext cx="11147071" cy="0"/>
+          </a:xfrm>
+          <a:prstGeom prst="line">
+            <a:avLst/>
+          </a:prstGeom>
+          <a:ln w="28575">
+            <a:solidFill>
+              <a:schemeClr val="tx2"/>
+            </a:solidFill>
+          </a:ln>
+        </p:spPr>
+        <p:style>
+          <a:lnRef idx="1">
+            <a:schemeClr val="dk1"/>
+          </a:lnRef>
+          <a:fillRef idx="0">
+            <a:schemeClr val="dk1"/>
+          </a:fillRef>
+          <a:effectRef idx="0">
+            <a:schemeClr val="dk1"/>
+          </a:effectRef>
+          <a:fontRef idx="minor">
+            <a:schemeClr val="tx1"/>
+          </a:fontRef>
+        </p:style>
+      </p:cxnSp>
+      <p:cxnSp>
+        <p:nvCxnSpPr>
+          <p:cNvPr id="11" name="Straight Connector 10">
+            <a:extLst>
+              <a:ext uri="{FF2B5EF4-FFF2-40B4-BE49-F238E27FC236}">
+                <a16:creationId xmlns:a16="http://schemas.microsoft.com/office/drawing/2014/main" id="{9DC76EBE-FB9D-4054-B5D8-19E3EAFE40B2}"/>
+              </a:ext>
+              <a:ext uri="{C183D7F6-B498-43B3-948B-1728B52AA6E4}">
+                <adec:decorative xmlns:adec="http://schemas.microsoft.com/office/drawing/2017/decorative" val="1"/>
+              </a:ext>
+            </a:extLst>
+          </p:cNvPr>
+          <p:cNvCxnSpPr>
+            <a:cxnSpLocks noGrp="1" noRot="1" noChangeAspect="1" noMove="1" noResize="1" noEditPoints="1" noAdjustHandles="1" noChangeArrowheads="1" noChangeShapeType="1"/>
+          </p:cNvCxnSpPr>
+          <p:nvPr>
+            <p:extLst>
+              <p:ext uri="{386F3935-93C4-4BCD-93E2-E3B085C9AB24}">
+                <p16:designElem xmlns:p16="http://schemas.microsoft.com/office/powerpoint/2015/main" val="1"/>
+              </p:ext>
+            </p:extLst>
+          </p:nvPr>
+        </p:nvCxnSpPr>
+        <p:spPr>
+          <a:xfrm>
+            <a:off x="482600" y="6368138"/>
+            <a:ext cx="11147071" cy="0"/>
+          </a:xfrm>
+          <a:prstGeom prst="line">
+            <a:avLst/>
+          </a:prstGeom>
+          <a:ln w="28575">
+            <a:solidFill>
+              <a:schemeClr val="tx2"/>
+            </a:solidFill>
+          </a:ln>
+        </p:spPr>
+        <p:style>
+          <a:lnRef idx="1">
+            <a:schemeClr val="dk1"/>
+          </a:lnRef>
+          <a:fillRef idx="0">
+            <a:schemeClr val="dk1"/>
+          </a:fillRef>
+          <a:effectRef idx="0">
+            <a:schemeClr val="dk1"/>
+          </a:effectRef>
+          <a:fontRef idx="minor">
+            <a:schemeClr val="tx1"/>
+          </a:fontRef>
+        </p:style>
+      </p:cxnSp>
+      <p:cxnSp>
+        <p:nvCxnSpPr>
+          <p:cNvPr id="13" name="Straight Connector 12">
+            <a:extLst>
+              <a:ext uri="{FF2B5EF4-FFF2-40B4-BE49-F238E27FC236}">
+                <a16:creationId xmlns:a16="http://schemas.microsoft.com/office/drawing/2014/main" id="{A2EFA84C-D756-4DC7-AA46-68D776F37FA4}"/>
+              </a:ext>
+              <a:ext uri="{C183D7F6-B498-43B3-948B-1728B52AA6E4}">
+                <adec:decorative xmlns:adec="http://schemas.microsoft.com/office/drawing/2017/decorative" val="1"/>
+              </a:ext>
+            </a:extLst>
+          </p:cNvPr>
+          <p:cNvCxnSpPr>
+            <a:cxnSpLocks noGrp="1" noRot="1" noChangeAspect="1" noMove="1" noResize="1" noEditPoints="1" noAdjustHandles="1" noChangeArrowheads="1" noChangeShapeType="1"/>
+          </p:cNvCxnSpPr>
+          <p:nvPr>
+            <p:extLst>
+              <p:ext uri="{386F3935-93C4-4BCD-93E2-E3B085C9AB24}">
+                <p16:designElem xmlns:p16="http://schemas.microsoft.com/office/powerpoint/2015/main" val="1"/>
+              </p:ext>
+            </p:extLst>
+          </p:nvPr>
+        </p:nvCxnSpPr>
+        <p:spPr>
+          <a:xfrm>
+            <a:off x="482600" y="489855"/>
+            <a:ext cx="11147071" cy="0"/>
+          </a:xfrm>
+          <a:prstGeom prst="line">
+            <a:avLst/>
+          </a:prstGeom>
+          <a:ln w="28575">
+            <a:solidFill>
+              <a:schemeClr val="tx2"/>
+            </a:solidFill>
+          </a:ln>
+        </p:spPr>
+        <p:style>
+          <a:lnRef idx="1">
+            <a:schemeClr val="dk1"/>
+          </a:lnRef>
+          <a:fillRef idx="0">
+            <a:schemeClr val="dk1"/>
+          </a:fillRef>
+          <a:effectRef idx="0">
+            <a:schemeClr val="dk1"/>
+          </a:effectRef>
+          <a:fontRef idx="minor">
+            <a:schemeClr val="tx1"/>
+          </a:fontRef>
+        </p:style>
+      </p:cxnSp>
+      <p:sp useBgFill="1">
+        <p:nvSpPr>
+          <p:cNvPr id="15" name="Rectangle 14">
+            <a:extLst>
+              <a:ext uri="{FF2B5EF4-FFF2-40B4-BE49-F238E27FC236}">
+                <a16:creationId xmlns:a16="http://schemas.microsoft.com/office/drawing/2014/main" id="{35F60170-91B4-45F0-B88B-9C07AEC4642C}"/>
+              </a:ext>
+              <a:ext uri="{C183D7F6-B498-43B3-948B-1728B52AA6E4}">
+                <adec:decorative xmlns:adec="http://schemas.microsoft.com/office/drawing/2017/decorative" val="1"/>
+              </a:ext>
+            </a:extLst>
+          </p:cNvPr>
+          <p:cNvSpPr>
+            <a:spLocks noGrp="1" noRot="1" noChangeAspect="1" noMove="1" noResize="1" noEditPoints="1" noAdjustHandles="1" noChangeArrowheads="1" noChangeShapeType="1" noTextEdit="1"/>
+          </p:cNvSpPr>
+          <p:nvPr>
+            <p:extLst>
+              <p:ext uri="{386F3935-93C4-4BCD-93E2-E3B085C9AB24}">
+                <p16:designElem xmlns:p16="http://schemas.microsoft.com/office/powerpoint/2015/main" val="1"/>
+              </p:ext>
+            </p:extLst>
+          </p:nvPr>
+        </p:nvSpPr>
+        <p:spPr>
+          <a:xfrm>
+            <a:off x="0" y="0"/>
+            <a:ext cx="12192000" cy="6858001"/>
+          </a:xfrm>
+          <a:prstGeom prst="rect">
+            <a:avLst/>
+          </a:prstGeom>
+          <a:ln>
+            <a:noFill/>
+          </a:ln>
+        </p:spPr>
+        <p:style>
+          <a:lnRef idx="2">
+            <a:schemeClr val="accent1">
+              <a:shade val="50000"/>
+            </a:schemeClr>
+          </a:lnRef>
+          <a:fillRef idx="1">
+            <a:schemeClr val="accent1"/>
+          </a:fillRef>
+          <a:effectRef idx="0">
+            <a:schemeClr val="accent1"/>
+          </a:effectRef>
+          <a:fontRef idx="minor">
+            <a:schemeClr val="lt1"/>
+          </a:fontRef>
+        </p:style>
+        <p:txBody>
+          <a:bodyPr rtlCol="0" anchor="ctr"/>
+          <a:lstStyle/>
+          <a:p>
+            <a:pPr algn="ctr"/>
+            <a:endParaRPr lang="en-US"/>
+          </a:p>
+        </p:txBody>
+      </p:sp>
+      <p:sp>
+        <p:nvSpPr>
+          <p:cNvPr id="4" name="Szövegdoboz 3">
+            <a:extLst>
+              <a:ext uri="{FF2B5EF4-FFF2-40B4-BE49-F238E27FC236}">
+                <a16:creationId xmlns:a16="http://schemas.microsoft.com/office/drawing/2014/main" id="{91499090-0956-2221-30A2-265410ADF278}"/>
+              </a:ext>
+            </a:extLst>
+          </p:cNvPr>
+          <p:cNvSpPr txBox="1"/>
+          <p:nvPr/>
+        </p:nvSpPr>
+        <p:spPr>
+          <a:xfrm>
+            <a:off x="5965296" y="1541070"/>
+            <a:ext cx="5614993" cy="3093468"/>
+          </a:xfrm>
+          <a:prstGeom prst="rect">
+            <a:avLst/>
+          </a:prstGeom>
+        </p:spPr>
+        <p:txBody>
+          <a:bodyPr vert="horz" lIns="91440" tIns="45720" rIns="91440" bIns="45720" rtlCol="0" anchor="b">
+            <a:normAutofit/>
+          </a:bodyPr>
+          <a:lstStyle/>
+          <a:p>
+            <a:pPr>
+              <a:lnSpc>
+                <a:spcPct val="90000"/>
+              </a:lnSpc>
+              <a:spcBef>
+                <a:spcPct val="0"/>
+              </a:spcBef>
+              <a:spcAft>
+                <a:spcPts val="600"/>
+              </a:spcAft>
+            </a:pPr>
+            <a:r>
+              <a:rPr lang="hu-HU" sz="4100" dirty="0">
+                <a:latin typeface="+mj-lt"/>
+                <a:ea typeface="+mj-ea"/>
+                <a:cs typeface="+mj-cs"/>
+              </a:rPr>
+              <a:t>Létre tudunk hozni edzésterveket és azokat módosítani, tetszés szerint.</a:t>
+            </a:r>
+            <a:endParaRPr lang="en-US" sz="4100" dirty="0">
+              <a:latin typeface="+mj-lt"/>
+              <a:ea typeface="+mj-ea"/>
+              <a:cs typeface="+mj-cs"/>
+            </a:endParaRPr>
+          </a:p>
+        </p:txBody>
+      </p:sp>
+      <p:cxnSp>
+        <p:nvCxnSpPr>
+          <p:cNvPr id="17" name="Straight Connector 16">
+            <a:extLst>
+              <a:ext uri="{FF2B5EF4-FFF2-40B4-BE49-F238E27FC236}">
+                <a16:creationId xmlns:a16="http://schemas.microsoft.com/office/drawing/2014/main" id="{FBE3B19C-5EF6-492A-AA6F-EC0C2F236D69}"/>
+              </a:ext>
+              <a:ext uri="{C183D7F6-B498-43B3-948B-1728B52AA6E4}">
+                <adec:decorative xmlns:adec="http://schemas.microsoft.com/office/drawing/2017/decorative" val="1"/>
+              </a:ext>
+            </a:extLst>
+          </p:cNvPr>
+          <p:cNvCxnSpPr>
+            <a:cxnSpLocks noGrp="1" noRot="1" noChangeAspect="1" noMove="1" noResize="1" noEditPoints="1" noAdjustHandles="1" noChangeArrowheads="1" noChangeShapeType="1"/>
+          </p:cNvCxnSpPr>
+          <p:nvPr>
+            <p:extLst>
+              <p:ext uri="{386F3935-93C4-4BCD-93E2-E3B085C9AB24}">
+                <p16:designElem xmlns:p16="http://schemas.microsoft.com/office/powerpoint/2015/main" val="1"/>
+              </p:ext>
+            </p:extLst>
+          </p:nvPr>
+        </p:nvCxnSpPr>
+        <p:spPr>
+          <a:xfrm>
+            <a:off x="482600" y="489855"/>
+            <a:ext cx="11147071" cy="0"/>
+          </a:xfrm>
+          <a:prstGeom prst="line">
+            <a:avLst/>
+          </a:prstGeom>
+          <a:ln w="28575">
+            <a:solidFill>
+              <a:schemeClr val="tx1"/>
+            </a:solidFill>
+          </a:ln>
+        </p:spPr>
+        <p:style>
+          <a:lnRef idx="1">
+            <a:schemeClr val="dk1"/>
+          </a:lnRef>
+          <a:fillRef idx="0">
+            <a:schemeClr val="dk1"/>
+          </a:fillRef>
+          <a:effectRef idx="0">
+            <a:schemeClr val="dk1"/>
+          </a:effectRef>
+          <a:fontRef idx="minor">
+            <a:schemeClr val="tx1"/>
+          </a:fontRef>
+        </p:style>
+      </p:cxnSp>
+      <p:pic>
+        <p:nvPicPr>
+          <p:cNvPr id="3" name="Kép 2" descr="A képen szöveg, képernyőkép, rajzfilm, Mobiltelefon látható&#10;&#10;Előfordulhat, hogy a mesterséges intelligencia által létrehozott tartalom helytelen.">
+            <a:extLst>
+              <a:ext uri="{FF2B5EF4-FFF2-40B4-BE49-F238E27FC236}">
+                <a16:creationId xmlns:a16="http://schemas.microsoft.com/office/drawing/2014/main" id="{CA340605-142C-9D98-751B-D6BA85AB3ED4}"/>
+              </a:ext>
+            </a:extLst>
+          </p:cNvPr>
+          <p:cNvPicPr>
+            <a:picLocks noChangeAspect="1"/>
+          </p:cNvPicPr>
+          <p:nvPr/>
+        </p:nvPicPr>
+        <p:blipFill>
+          <a:blip r:embed="rId3">
+            <a:alphaModFix/>
+          </a:blip>
+          <a:stretch>
+            <a:fillRect/>
+          </a:stretch>
+        </p:blipFill>
+        <p:spPr>
+          <a:xfrm>
+            <a:off x="637715" y="668861"/>
+            <a:ext cx="4715871" cy="5523092"/>
+          </a:xfrm>
+          <a:prstGeom prst="rect">
+            <a:avLst/>
+          </a:prstGeom>
+          <a:ln>
+            <a:solidFill>
+              <a:schemeClr val="tx1"/>
+            </a:solidFill>
+          </a:ln>
+        </p:spPr>
+      </p:pic>
+      <p:cxnSp>
+        <p:nvCxnSpPr>
+          <p:cNvPr id="19" name="Straight Connector 18">
+            <a:extLst>
+              <a:ext uri="{FF2B5EF4-FFF2-40B4-BE49-F238E27FC236}">
+                <a16:creationId xmlns:a16="http://schemas.microsoft.com/office/drawing/2014/main" id="{02DB647E-7779-454B-9098-17E6CE33DDCB}"/>
+              </a:ext>
+              <a:ext uri="{C183D7F6-B498-43B3-948B-1728B52AA6E4}">
+                <adec:decorative xmlns:adec="http://schemas.microsoft.com/office/drawing/2017/decorative" val="1"/>
+              </a:ext>
+            </a:extLst>
+          </p:cNvPr>
+          <p:cNvCxnSpPr>
+            <a:cxnSpLocks noGrp="1" noRot="1" noChangeAspect="1" noMove="1" noResize="1" noEditPoints="1" noAdjustHandles="1" noChangeArrowheads="1" noChangeShapeType="1"/>
+          </p:cNvCxnSpPr>
+          <p:nvPr>
+            <p:extLst>
+              <p:ext uri="{386F3935-93C4-4BCD-93E2-E3B085C9AB24}">
+                <p16:designElem xmlns:p16="http://schemas.microsoft.com/office/powerpoint/2015/main" val="1"/>
+              </p:ext>
+            </p:extLst>
+          </p:nvPr>
+        </p:nvCxnSpPr>
+        <p:spPr>
+          <a:xfrm>
+            <a:off x="482600" y="6368138"/>
+            <a:ext cx="11147071" cy="0"/>
+          </a:xfrm>
+          <a:prstGeom prst="line">
+            <a:avLst/>
+          </a:prstGeom>
+          <a:ln w="28575">
+            <a:solidFill>
+              <a:schemeClr val="tx1"/>
+            </a:solidFill>
+          </a:ln>
+        </p:spPr>
+        <p:style>
+          <a:lnRef idx="1">
+            <a:schemeClr val="dk1"/>
+          </a:lnRef>
+          <a:fillRef idx="0">
+            <a:schemeClr val="dk1"/>
+          </a:fillRef>
+          <a:effectRef idx="0">
+            <a:schemeClr val="dk1"/>
+          </a:effectRef>
+          <a:fontRef idx="minor">
+            <a:schemeClr val="tx1"/>
+          </a:fontRef>
+        </p:style>
+      </p:cxnSp>
+    </p:spTree>
+    <p:extLst>
+      <p:ext uri="{BB962C8B-B14F-4D97-AF65-F5344CB8AC3E}">
+        <p14:creationId xmlns:p14="http://schemas.microsoft.com/office/powerpoint/2010/main" val="2059224853"/>
       </p:ext>
     </p:extLst>
   </p:cSld>
